--- a/templates/макет-презентація.pptx
+++ b/templates/макет-презентація.pptx
@@ -1584,6 +1584,36 @@
           </a:prstGeom>
         </p:spPr>
       </p:pic>
+      <p:pic>
+        <p:nvPicPr>
+          <p:cNvPr id="4" name="Рисунок 3">
+            <a:extLst>
+              <a:ext uri="{FF2B5EF4-FFF2-40B4-BE49-F238E27FC236}">
+                <a16:creationId xmlns:a16="http://schemas.microsoft.com/office/drawing/2014/main" id="{086D36AC-5E53-0910-9EC3-40173AD5AAE4}"/>
+              </a:ext>
+            </a:extLst>
+          </p:cNvPr>
+          <p:cNvPicPr>
+            <a:picLocks noChangeAspect="1"/>
+          </p:cNvPicPr>
+          <p:nvPr userDrawn="1"/>
+        </p:nvPicPr>
+        <p:blipFill>
+          <a:blip r:embed="rId8"/>
+          <a:stretch>
+            <a:fillRect/>
+          </a:stretch>
+        </p:blipFill>
+        <p:spPr>
+          <a:xfrm>
+            <a:off x="9716809" y="5934234"/>
+            <a:ext cx="2475191" cy="731583"/>
+          </a:xfrm>
+          <a:prstGeom prst="rect">
+            <a:avLst/>
+          </a:prstGeom>
+        </p:spPr>
+      </p:pic>
     </p:spTree>
     <p:extLst>
       <p:ext uri="{BB962C8B-B14F-4D97-AF65-F5344CB8AC3E}">
@@ -4726,6 +4756,36 @@
           </a:p>
         </p:txBody>
       </p:sp>
+      <p:pic>
+        <p:nvPicPr>
+          <p:cNvPr id="16" name="Рисунок 15">
+            <a:extLst>
+              <a:ext uri="{FF2B5EF4-FFF2-40B4-BE49-F238E27FC236}">
+                <a16:creationId xmlns:a16="http://schemas.microsoft.com/office/drawing/2014/main" id="{1C28EE00-E002-5087-591E-187DC98FDCCC}"/>
+              </a:ext>
+            </a:extLst>
+          </p:cNvPr>
+          <p:cNvPicPr>
+            <a:picLocks noChangeAspect="1"/>
+          </p:cNvPicPr>
+          <p:nvPr userDrawn="1"/>
+        </p:nvPicPr>
+        <p:blipFill>
+          <a:blip r:embed="rId6"/>
+          <a:stretch>
+            <a:fillRect/>
+          </a:stretch>
+        </p:blipFill>
+        <p:spPr>
+          <a:xfrm>
+            <a:off x="9716809" y="5934234"/>
+            <a:ext cx="2475191" cy="731583"/>
+          </a:xfrm>
+          <a:prstGeom prst="rect">
+            <a:avLst/>
+          </a:prstGeom>
+        </p:spPr>
+      </p:pic>
     </p:spTree>
     <p:extLst>
       <p:ext uri="{BB962C8B-B14F-4D97-AF65-F5344CB8AC3E}">
@@ -6254,6 +6314,36 @@
           </a:p>
         </p:txBody>
       </p:sp>
+      <p:pic>
+        <p:nvPicPr>
+          <p:cNvPr id="10" name="Рисунок 9">
+            <a:extLst>
+              <a:ext uri="{FF2B5EF4-FFF2-40B4-BE49-F238E27FC236}">
+                <a16:creationId xmlns:a16="http://schemas.microsoft.com/office/drawing/2014/main" id="{259297BE-2654-0AD9-799C-A2C64EEBA663}"/>
+              </a:ext>
+            </a:extLst>
+          </p:cNvPr>
+          <p:cNvPicPr>
+            <a:picLocks noChangeAspect="1"/>
+          </p:cNvPicPr>
+          <p:nvPr userDrawn="1"/>
+        </p:nvPicPr>
+        <p:blipFill>
+          <a:blip r:embed="rId7"/>
+          <a:stretch>
+            <a:fillRect/>
+          </a:stretch>
+        </p:blipFill>
+        <p:spPr>
+          <a:xfrm>
+            <a:off x="9716809" y="5934234"/>
+            <a:ext cx="2475191" cy="731583"/>
+          </a:xfrm>
+          <a:prstGeom prst="rect">
+            <a:avLst/>
+          </a:prstGeom>
+        </p:spPr>
+      </p:pic>
     </p:spTree>
     <p:extLst>
       <p:ext uri="{BB962C8B-B14F-4D97-AF65-F5344CB8AC3E}">
@@ -7538,6 +7628,36 @@
           </a:fontRef>
         </p:style>
       </p:cxnSp>
+      <p:pic>
+        <p:nvPicPr>
+          <p:cNvPr id="4" name="Рисунок 3">
+            <a:extLst>
+              <a:ext uri="{FF2B5EF4-FFF2-40B4-BE49-F238E27FC236}">
+                <a16:creationId xmlns:a16="http://schemas.microsoft.com/office/drawing/2014/main" id="{AFFA3B22-20EE-82B3-3B0F-36A3EB02434F}"/>
+              </a:ext>
+            </a:extLst>
+          </p:cNvPr>
+          <p:cNvPicPr>
+            <a:picLocks noChangeAspect="1"/>
+          </p:cNvPicPr>
+          <p:nvPr userDrawn="1"/>
+        </p:nvPicPr>
+        <p:blipFill>
+          <a:blip r:embed="rId7"/>
+          <a:stretch>
+            <a:fillRect/>
+          </a:stretch>
+        </p:blipFill>
+        <p:spPr>
+          <a:xfrm>
+            <a:off x="9716809" y="5934234"/>
+            <a:ext cx="2475191" cy="731583"/>
+          </a:xfrm>
+          <a:prstGeom prst="rect">
+            <a:avLst/>
+          </a:prstGeom>
+        </p:spPr>
+      </p:pic>
     </p:spTree>
     <p:extLst>
       <p:ext uri="{BB962C8B-B14F-4D97-AF65-F5344CB8AC3E}">
@@ -7801,6 +7921,36 @@
           </a:fontRef>
         </p:style>
       </p:cxnSp>
+      <p:pic>
+        <p:nvPicPr>
+          <p:cNvPr id="16" name="Рисунок 15">
+            <a:extLst>
+              <a:ext uri="{FF2B5EF4-FFF2-40B4-BE49-F238E27FC236}">
+                <a16:creationId xmlns:a16="http://schemas.microsoft.com/office/drawing/2014/main" id="{2556AA08-A8D3-AF40-1A6D-F4A4FEE98E72}"/>
+              </a:ext>
+            </a:extLst>
+          </p:cNvPr>
+          <p:cNvPicPr>
+            <a:picLocks noChangeAspect="1"/>
+          </p:cNvPicPr>
+          <p:nvPr userDrawn="1"/>
+        </p:nvPicPr>
+        <p:blipFill>
+          <a:blip r:embed="rId2"/>
+          <a:stretch>
+            <a:fillRect/>
+          </a:stretch>
+        </p:blipFill>
+        <p:spPr>
+          <a:xfrm>
+            <a:off x="9716809" y="5934234"/>
+            <a:ext cx="2475191" cy="731583"/>
+          </a:xfrm>
+          <a:prstGeom prst="rect">
+            <a:avLst/>
+          </a:prstGeom>
+        </p:spPr>
+      </p:pic>
     </p:spTree>
     <p:extLst>
       <p:ext uri="{BB962C8B-B14F-4D97-AF65-F5344CB8AC3E}">
@@ -8758,6 +8908,36 @@
           </a:p>
         </p:txBody>
       </p:sp>
+      <p:pic>
+        <p:nvPicPr>
+          <p:cNvPr id="8" name="Рисунок 7">
+            <a:extLst>
+              <a:ext uri="{FF2B5EF4-FFF2-40B4-BE49-F238E27FC236}">
+                <a16:creationId xmlns:a16="http://schemas.microsoft.com/office/drawing/2014/main" id="{A35998FB-727D-A879-AF6F-727E20E3E4E2}"/>
+              </a:ext>
+            </a:extLst>
+          </p:cNvPr>
+          <p:cNvPicPr>
+            <a:picLocks noChangeAspect="1"/>
+          </p:cNvPicPr>
+          <p:nvPr userDrawn="1"/>
+        </p:nvPicPr>
+        <p:blipFill>
+          <a:blip r:embed="rId8"/>
+          <a:stretch>
+            <a:fillRect/>
+          </a:stretch>
+        </p:blipFill>
+        <p:spPr>
+          <a:xfrm>
+            <a:off x="9716809" y="5934234"/>
+            <a:ext cx="2475191" cy="731583"/>
+          </a:xfrm>
+          <a:prstGeom prst="rect">
+            <a:avLst/>
+          </a:prstGeom>
+        </p:spPr>
+      </p:pic>
     </p:spTree>
     <p:extLst>
       <p:ext uri="{BB962C8B-B14F-4D97-AF65-F5344CB8AC3E}">
